--- a/mvccc_master_keynote_blue.pptx
+++ b/mvccc_master_keynote_blue.pptx
@@ -621,8 +621,8 @@
         </p:nvSpPr>
         <p:spPr>
           <a:xfrm>
-            <a:off x="406400" y="589901"/>
-            <a:ext cx="11379200" cy="5678198"/>
+            <a:off x="406400" y="914400"/>
+            <a:ext cx="11379200" cy="5353699"/>
           </a:xfrm>
           <a:prstGeom prst="rect">
             <a:avLst/>
@@ -632,7 +632,7 @@
           <a:bodyPr/>
           <a:lstStyle>
             <a:lvl1pPr algn="ctr">
-              <a:defRPr sz="7200"/>
+              <a:defRPr sz="7600"/>
             </a:lvl1pPr>
           </a:lstStyle>
           <a:p>

--- a/mvccc_master_keynote_blue.pptx
+++ b/mvccc_master_keynote_blue.pptx
@@ -951,7 +951,7 @@
           <a:bodyPr/>
           <a:lstStyle>
             <a:lvl1pPr>
-              <a:defRPr sz="3800">
+              <a:defRPr sz="4800">
                 <a:latin typeface="Helvetica Neue"/>
                 <a:ea typeface="Helvetica Neue"/>
                 <a:cs typeface="Helvetica Neue"/>

--- a/mvccc_master_keynote_blue.pptx
+++ b/mvccc_master_keynote_blue.pptx
@@ -679,7 +679,7 @@
 </file>
 
 <file path=ppt/slideLayouts/slideLayout2.xml><?xml version="1.0" encoding="utf-8"?>
-<p:sldLayout xmlns:a="http://schemas.openxmlformats.org/drawingml/2006/main" xmlns:r="http://schemas.openxmlformats.org/officeDocument/2006/relationships" xmlns:p="http://schemas.openxmlformats.org/presentationml/2006/main" xmlns:m="http://schemas.openxmlformats.org/officeDocument/2006/math" xmlns:a14="http://schemas.microsoft.com/office/drawing/2010/main" type="tx" showMasterSp="1" showMasterPhAnim="1">
+<p:sldLayout xmlns:a="http://schemas.openxmlformats.org/drawingml/2006/main" xmlns:p="http://schemas.openxmlformats.org/presentationml/2006/main" type="tx" showMasterSp="1" showMasterPhAnim="1">
   <p:cSld name="message">
     <p:spTree>
       <p:nvGrpSpPr>
@@ -715,7 +715,7 @@
         <p:txBody>
           <a:bodyPr/>
           <a:lstStyle>
-            <a:lvl1pPr marL="339470" indent="-339470" defTabSz="905255">
+            <a:lvl1pPr marL="339470" indent="-339470" defTabSz="905255" algn="l">
               <a:spcBef>
                 <a:spcPts val="400"/>
               </a:spcBef>
@@ -729,7 +729,7 @@
             </a:lvl1pPr>
           </a:lstStyle>
           <a:p>
-            <a:pPr/>
+            <a:pPr algn="l"/>
             <a:r>
               <a:t>惟耶和華在他的聖殿中；全地的人，都當在他面前肅敬靜默。</a:t>
             </a:r>
@@ -753,7 +753,7 @@
           <a:bodyPr/>
           <a:lstStyle/>
           <a:p>
-            <a:pPr/>
+            <a:pPr algn="l"/>
             <a:fld id="{86CB4B4D-7CA3-9044-876B-883B54F8677D}" type="slidenum"/>
           </a:p>
         </p:txBody>
@@ -763,7 +763,7 @@
   <p:clrMapOvr>
     <a:masterClrMapping/>
   </p:clrMapOvr>
-  <p:transition xmlns:p14="http://schemas.microsoft.com/office/powerpoint/2010/main" spd="med" advClick="1"/>
+  <p:transition spd="med" advClick="1"/>
 </p:sldLayout>
 </file>
 
@@ -946,6 +946,10 @@
           <a:prstGeom prst="rect">
             <a:avLst/>
           </a:prstGeom>
+          <a:xfrm>
+            <a:off x="406400" y="2286000"/>
+            <a:ext cx="11379200" cy="4267200"/>
+          </a:xfrm>
         </p:spPr>
         <p:txBody>
           <a:bodyPr/>
@@ -1410,7 +1414,7 @@
     <p:bg>
       <p:bgPr>
         <a:blipFill dpi="0" rotWithShape="1">
-          <a:blip xmlns:r="http://schemas.openxmlformats.org/officeDocument/2006/relationships" r:embed="rId13"/>
+          <a:blip r:embed="rId13"/>
           <a:stretch>
             <a:fillRect/>
           </a:stretch>
@@ -1431,35 +1435,6 @@
           <a:chExt cx="0" cy="0"/>
         </a:xfrm>
       </p:grpSpPr>
-      <p:pic>
-        <p:nvPicPr>
-          <p:cNvPr id="10" name="MVCCC Logo" descr="MVCCC Logo"/>
-          <p:cNvPicPr>
-            <a:picLocks noChangeAspect="1"/>
-          </p:cNvPicPr>
-          <p:nvPr/>
-        </p:nvPicPr>
-        <p:blipFill>
-          <a:blip r:embed="rId2">
-            <a:extLst/>
-          </a:blip>
-          <a:stretch>
-            <a:fillRect/>
-          </a:stretch>
-        </p:blipFill>
-        <p:spPr>
-          <a:xfrm>
-            <a:off x="9814255" y="5810865"/>
-            <a:ext cx="2011681" cy="681376"/>
-          </a:xfrm>
-          <a:prstGeom prst="rect">
-            <a:avLst/>
-          </a:prstGeom>
-          <a:ln w="12700">
-            <a:miter lim="400000"/>
-          </a:ln>
-        </p:spPr>
-      </p:pic>
       <p:sp>
         <p:nvSpPr>
           <p:cNvPr id="11" name="約翰福音 3:16"/>

--- a/mvccc_master_keynote_blue.pptx
+++ b/mvccc_master_keynote_blue.pptx
@@ -719,7 +719,7 @@
               <a:spcBef>
                 <a:spcPts val="400"/>
               </a:spcBef>
-              <a:defRPr sz="6336">
+              <a:defRPr sz="7200">
                 <a:effectLst>
                   <a:outerShdw sx="100000" sy="100000" kx="0" ky="0" algn="b" rotWithShape="0" blurRad="37719" dist="37719" dir="2700000">
                     <a:srgbClr val="0B0F14"/>
@@ -1043,7 +1043,7 @@
           <ns1:bodyPr/>
           <ns1:lstStyle>
             <ns1:lvl1pPr>
-              <ns1:defRPr b="1" sz="5200">
+              <ns1:defRPr b="1" sz="6000">
                 <ns1:latin typeface="Helvetica Neue"/>
                 <ns1:ea typeface="Helvetica Neue"/>
                 <ns1:cs typeface="Helvetica Neue"/>
@@ -1080,7 +1080,7 @@
           <ns1:bodyPr/>
           <ns1:lstStyle>
             <ns1:lvl1pPr algn="ctr">
-              <ns1:defRPr sz="4000">
+              <ns1:defRPr sz="4800">
                 <ns1:latin typeface="Helvetica Neue"/>
                 <ns1:ea typeface="Helvetica Neue"/>
                 <ns1:cs typeface="Helvetica Neue"/>
@@ -1611,7 +1611,7 @@
         <a:buFontTx/>
         <a:buNone/>
         <a:tabLst/>
-        <a:defRPr b="0" baseline="0" cap="none" i="0" spc="0" strike="noStrike" sz="6400" u="none">
+        <a:defRPr b="0" baseline="0" cap="none" i="0" spc="0" strike="noStrike" sz="7200" u="none">
           <a:solidFill>
             <a:schemeClr val="accent6"/>
           </a:solidFill>

--- a/mvccc_master_keynote_blue.pptx
+++ b/mvccc_master_keynote_blue.pptx
@@ -1339,14 +1339,14 @@
         <p:spPr>
           <a:xfrm>
             <a:off x="1158086" y="1800000"/>
-            <a:ext cx="9875521" cy="3200000"/>
+            <a:ext cx="9875521" cy="2438400"/>
           </a:xfrm>
           <a:prstGeom prst="rect">
             <a:avLst/>
           </a:prstGeom>
         </p:spPr>
         <p:txBody>
-          <a:bodyPr/>
+          <a:bodyPr wrap="none"/>
           <a:lstStyle>
             <a:lvl1pPr>
               <a:defRPr sz="4000">
